--- a/presentation/Review2_Presentation.pptx
+++ b/presentation/Review2_Presentation.pptx
@@ -6732,8 +6732,8 @@
         </p:nvSpPr>
         <p:spPr>
           <a:xfrm>
-            <a:off x="731520" y="1463040"/>
-            <a:ext cx="3429000" cy="4754880"/>
+            <a:off x="731520" y="1371600"/>
+            <a:ext cx="4937760" cy="4937760"/>
           </a:xfrm>
           <a:prstGeom prst="roundRect">
             <a:avLst/>
@@ -6777,8 +6777,8 @@
         </p:nvSpPr>
         <p:spPr>
           <a:xfrm>
-            <a:off x="960120" y="1691640"/>
-            <a:ext cx="2971800" cy="4297680"/>
+            <a:off x="914400" y="1554480"/>
+            <a:ext cx="4572000" cy="4572000"/>
           </a:xfrm>
           <a:prstGeom prst="rect">
             <a:avLst/>
@@ -6792,20 +6792,20 @@
           <a:lstStyle/>
           <a:p>
             <a:pPr>
-              <a:defRPr sz="1200" b="1">
+              <a:defRPr sz="1300" b="1">
                 <a:solidFill>
                   <a:srgbClr val="2563EB"/>
                 </a:solidFill>
               </a:defRPr>
             </a:pPr>
             <a:r>
-              <a:t>1. Audio DSP Feature Extraction Core</a:t>
+              <a:t>20% Prototype Deliverables Completed</a:t>
             </a:r>
           </a:p>
           <a:p>
             <a:pPr>
               <a:spcBef>
-                <a:spcPts val="800"/>
+                <a:spcPts val="700"/>
               </a:spcBef>
               <a:defRPr sz="950" b="1">
                 <a:solidFill>
@@ -6814,7 +6814,7 @@
               </a:defRPr>
             </a:pPr>
             <a:r>
-              <a:t>✔ 16 kHz DMA Sampling Pipeline: </a:t>
+              <a:t>✔ 16 kHz Audio DMA Sampling Pipeline: </a:t>
             </a:r>
             <a:r>
               <a:rPr b="0">
@@ -6822,13 +6822,13 @@
                   <a:srgbClr val="64748B"/>
                 </a:solidFill>
               </a:rPr>
-              <a:t>Implemented circular ring buffer and Hanning windowing to ingest continuous structural acoustic samples.</a:t>
+              <a:t>Implemented circular double buffering and Hanning windowing to ingest continuous structural acoustic vibrations on ESP32 Core 0.</a:t>
             </a:r>
           </a:p>
           <a:p>
             <a:pPr>
               <a:spcBef>
-                <a:spcPts val="800"/>
+                <a:spcPts val="700"/>
               </a:spcBef>
               <a:defRPr sz="950" b="1">
                 <a:solidFill>
@@ -6837,7 +6837,7 @@
               </a:defRPr>
             </a:pPr>
             <a:r>
-              <a:t>✔ Real-Time Log-Mel Spectrograms: </a:t>
+              <a:t>✔ Real-Time Log-Mel Spectrogram Engine: </a:t>
             </a:r>
             <a:r>
               <a:rPr b="0">
@@ -6845,13 +6845,13 @@
                   <a:srgbClr val="64748B"/>
                 </a:solidFill>
               </a:rPr>
-              <a:t>Successfully converted time-domain waveforms into 2D spectro-temporal matrices tuned to 1–8 kHz turbulence.</a:t>
+              <a:t>Engineered 32-band filterbank conversion scaled to 0.5–8 kHz fluid turbulence frequencies, generating 2D feature maps.</a:t>
             </a:r>
           </a:p>
           <a:p>
             <a:pPr>
               <a:spcBef>
-                <a:spcPts val="800"/>
+                <a:spcPts val="700"/>
               </a:spcBef>
               <a:defRPr sz="950" b="1">
                 <a:solidFill>
@@ -6860,7 +6860,7 @@
               </a:defRPr>
             </a:pPr>
             <a:r>
-              <a:t>✔ Noise Rejection Verified: </a:t>
+              <a:t>✔ Empirical Spectral Energy Elevation: </a:t>
             </a:r>
             <a:r>
               <a:rPr b="0">
@@ -6868,7 +6868,53 @@
                   <a:srgbClr val="64748B"/>
                 </a:solidFill>
               </a:rPr>
-              <a:t>High-pass analog filter (&gt;500 Hz) confirmed to attenuate 50 Hz mains hum and motor rumble.</a:t>
+              <a:t>Experimental frequency sweeps confirm &gt;30 dB spectral density surge in 1.5–4.5 kHz band during needle-valve micro-cracks vs. laminar flow.</a:t>
+            </a:r>
+          </a:p>
+          <a:p>
+            <a:pPr>
+              <a:spcBef>
+                <a:spcPts val="700"/>
+              </a:spcBef>
+              <a:defRPr sz="950" b="1">
+                <a:solidFill>
+                  <a:srgbClr val="0F172A"/>
+                </a:solidFill>
+              </a:defRPr>
+            </a:pPr>
+            <a:r>
+              <a:t>✔ Dual-Core FreeRTOS Task Architecture: </a:t>
+            </a:r>
+            <a:r>
+              <a:rPr b="0">
+                <a:solidFill>
+                  <a:srgbClr val="64748B"/>
+                </a:solidFill>
+              </a:rPr>
+              <a:t>Decoupled sampling/DSP (Core 0) from TinyML inference and actuation state machines (Core 1).</a:t>
+            </a:r>
+          </a:p>
+          <a:p>
+            <a:pPr>
+              <a:spcBef>
+                <a:spcPts val="700"/>
+              </a:spcBef>
+              <a:defRPr sz="950" b="1">
+                <a:solidFill>
+                  <a:srgbClr val="0F172A"/>
+                </a:solidFill>
+              </a:defRPr>
+            </a:pPr>
+            <a:r>
+              <a:t>✔ Sub-Second Solenoid Shutoff Logic: </a:t>
+            </a:r>
+            <a:r>
+              <a:rPr b="0">
+                <a:solidFill>
+                  <a:srgbClr val="64748B"/>
+                </a:solidFill>
+              </a:rPr>
+              <a:t>Validated fail-safe GPIO relay trigger executing in &lt;50ms upon simulated anomaly condition.</a:t>
             </a:r>
           </a:p>
         </p:txBody>
@@ -6881,8 +6927,8 @@
         </p:nvSpPr>
         <p:spPr>
           <a:xfrm>
-            <a:off x="4343400" y="1463040"/>
-            <a:ext cx="3429000" cy="4754880"/>
+            <a:off x="5943600" y="1371600"/>
+            <a:ext cx="5486400" cy="4937760"/>
           </a:xfrm>
           <a:prstGeom prst="roundRect">
             <a:avLst/>
@@ -6926,8 +6972,8 @@
         </p:nvSpPr>
         <p:spPr>
           <a:xfrm>
-            <a:off x="4572000" y="1691640"/>
-            <a:ext cx="2971800" cy="4297680"/>
+            <a:off x="6126480" y="1554480"/>
+            <a:ext cx="5120640" cy="457200"/>
           </a:xfrm>
           <a:prstGeom prst="rect">
             <a:avLst/>
@@ -6935,138 +6981,48 @@
           <a:noFill/>
         </p:spPr>
         <p:txBody>
-          <a:bodyPr wrap="square" tIns="0" lIns="0" rIns="0" bIns="0">
+          <a:bodyPr wrap="square">
             <a:spAutoFit/>
           </a:bodyPr>
           <a:lstStyle/>
           <a:p>
             <a:pPr>
-              <a:defRPr sz="1200" b="1">
+              <a:defRPr sz="1150" b="1">
                 <a:solidFill>
                   <a:srgbClr val="0F172A"/>
                 </a:solidFill>
               </a:defRPr>
             </a:pPr>
             <a:r>
-              <a:t>2. Empirical Spectral Signature Analysis</a:t>
-            </a:r>
-          </a:p>
-          <a:p>
-            <a:pPr>
-              <a:spcBef>
-                <a:spcPts val="800"/>
-              </a:spcBef>
-              <a:defRPr sz="950" b="1">
-                <a:solidFill>
-                  <a:srgbClr val="0F172A"/>
-                </a:solidFill>
-              </a:defRPr>
-            </a:pPr>
-            <a:r>
-              <a:t>✔ Baseline vs. Leak Separation: </a:t>
-            </a:r>
-            <a:r>
-              <a:rPr b="0">
-                <a:solidFill>
-                  <a:srgbClr val="64748B"/>
-                </a:solidFill>
-              </a:rPr>
-              <a:t>Conducted frequency sweep testing demonstrating marked energy density elevation between 1.5 kHz and 4.2 kHz during simulated micro-cracks.</a:t>
-            </a:r>
-          </a:p>
-          <a:p>
-            <a:pPr>
-              <a:spcBef>
-                <a:spcPts val="800"/>
-              </a:spcBef>
-              <a:defRPr sz="950" b="1">
-                <a:solidFill>
-                  <a:srgbClr val="0F172A"/>
-                </a:solidFill>
-              </a:defRPr>
-            </a:pPr>
-            <a:r>
-              <a:t>✔ High SNR Ratio: </a:t>
-            </a:r>
-            <a:r>
-              <a:rPr b="0">
-                <a:solidFill>
-                  <a:srgbClr val="64748B"/>
-                </a:solidFill>
-              </a:rPr>
-              <a:t>Contact piezo yields &gt;18 dB signal-to-noise ratio over ambient room conversation.</a:t>
-            </a:r>
-          </a:p>
-          <a:p>
-            <a:pPr>
-              <a:spcBef>
-                <a:spcPts val="800"/>
-              </a:spcBef>
-              <a:defRPr sz="950" b="1">
-                <a:solidFill>
-                  <a:srgbClr val="0F172A"/>
-                </a:solidFill>
-              </a:defRPr>
-            </a:pPr>
-            <a:r>
-              <a:t>✔ Dataset Blueprint: </a:t>
-            </a:r>
-            <a:r>
-              <a:rPr b="0">
-                <a:solidFill>
-                  <a:srgbClr val="64748B"/>
-                </a:solidFill>
-              </a:rPr>
-              <a:t>Established formal training data capture matrix for normal flow, micro-leak, rupture, and mechanical tap noise.</a:t>
-            </a:r>
-          </a:p>
-        </p:txBody>
-      </p:sp>
-      <p:sp>
-        <p:nvSpPr>
-          <p:cNvPr id="8" name="Rounded Rectangle 7"/>
-          <p:cNvSpPr/>
+              <a:t>Empirical Proof: Laminar Flow vs. Micro-Leak Turbulence</a:t>
+            </a:r>
+          </a:p>
+        </p:txBody>
+      </p:sp>
+      <p:pic>
+        <p:nvPicPr>
+          <p:cNvPr id="8" name="Picture 7" descr="spectral_comparison.png"/>
+          <p:cNvPicPr>
+            <a:picLocks noChangeAspect="1"/>
+          </p:cNvPicPr>
           <p:nvPr/>
-        </p:nvSpPr>
-        <p:spPr>
-          <a:xfrm>
-            <a:off x="7955280" y="1463040"/>
-            <a:ext cx="3429000" cy="4754880"/>
-          </a:xfrm>
-          <a:prstGeom prst="roundRect">
-            <a:avLst/>
-          </a:prstGeom>
-          <a:solidFill>
-            <a:srgbClr val="FFFFFF"/>
-          </a:solidFill>
-          <a:ln>
-            <a:solidFill>
-              <a:srgbClr val="E2E8F0"/>
-            </a:solidFill>
-          </a:ln>
-        </p:spPr>
-        <p:style>
-          <a:lnRef idx="1">
-            <a:schemeClr val="accent1"/>
-          </a:lnRef>
-          <a:fillRef idx="3">
-            <a:schemeClr val="accent1"/>
-          </a:fillRef>
-          <a:effectRef idx="2">
-            <a:schemeClr val="accent1"/>
-          </a:effectRef>
-          <a:fontRef idx="minor">
-            <a:schemeClr val="lt1"/>
-          </a:fontRef>
-        </p:style>
-        <p:txBody>
-          <a:bodyPr rtlCol="0" anchor="ctr"/>
-          <a:lstStyle/>
-          <a:p>
-            <a:pPr algn="ctr"/>
-          </a:p>
-        </p:txBody>
-      </p:sp>
+        </p:nvPicPr>
+        <p:blipFill>
+          <a:blip r:embed="rId2"/>
+          <a:stretch>
+            <a:fillRect/>
+          </a:stretch>
+        </p:blipFill>
+        <p:spPr>
+          <a:xfrm>
+            <a:off x="6080760" y="2011680"/>
+            <a:ext cx="5212080" cy="1737360"/>
+          </a:xfrm>
+          <a:prstGeom prst="rect">
+            <a:avLst/>
+          </a:prstGeom>
+        </p:spPr>
+      </p:pic>
       <p:sp>
         <p:nvSpPr>
           <p:cNvPr id="9" name="TextBox 8"/>
@@ -7075,8 +7031,8 @@
         </p:nvSpPr>
         <p:spPr>
           <a:xfrm>
-            <a:off x="8183880" y="1691640"/>
-            <a:ext cx="2971800" cy="4297680"/>
+            <a:off x="6126480" y="4846320"/>
+            <a:ext cx="5120640" cy="1188720"/>
           </a:xfrm>
           <a:prstGeom prst="rect">
             <a:avLst/>
@@ -7084,89 +7040,20 @@
           <a:noFill/>
         </p:spPr>
         <p:txBody>
-          <a:bodyPr wrap="square" tIns="0" lIns="0" rIns="0" bIns="0">
+          <a:bodyPr wrap="square">
             <a:spAutoFit/>
           </a:bodyPr>
           <a:lstStyle/>
           <a:p>
             <a:pPr>
-              <a:defRPr sz="1200" b="1">
-                <a:solidFill>
-                  <a:srgbClr val="0F172A"/>
-                </a:solidFill>
-              </a:defRPr>
-            </a:pPr>
-            <a:r>
-              <a:t>3. Firmware Scaffold &amp; Actuation Loop</a:t>
-            </a:r>
-          </a:p>
-          <a:p>
-            <a:pPr>
-              <a:spcBef>
-                <a:spcPts val="800"/>
-              </a:spcBef>
-              <a:defRPr sz="950" b="1">
-                <a:solidFill>
-                  <a:srgbClr val="0F172A"/>
-                </a:solidFill>
-              </a:defRPr>
-            </a:pPr>
-            <a:r>
-              <a:t>✔ FreeRTOS Task Separation: </a:t>
-            </a:r>
-            <a:r>
-              <a:rPr b="0">
+              <a:defRPr sz="850" i="1">
                 <a:solidFill>
                   <a:srgbClr val="64748B"/>
                 </a:solidFill>
-              </a:rPr>
-              <a:t>PlatformIO project scaffolded with Core 0/1 pinned tasks communicating via thread-safe FreeRTOS queues.</a:t>
-            </a:r>
-          </a:p>
-          <a:p>
-            <a:pPr>
-              <a:spcBef>
-                <a:spcPts val="800"/>
-              </a:spcBef>
-              <a:defRPr sz="950" b="1">
-                <a:solidFill>
-                  <a:srgbClr val="0F172A"/>
-                </a:solidFill>
-              </a:defRPr>
-            </a:pPr>
-            <a:r>
-              <a:t>✔ Relay State Machine: </a:t>
-            </a:r>
-            <a:r>
-              <a:rPr b="0">
-                <a:solidFill>
-                  <a:srgbClr val="64748B"/>
-                </a:solidFill>
-              </a:rPr>
-              <a:t>Sub-second emergency shutoff GPIO trigger logic validated on simulated anomaly condition.</a:t>
-            </a:r>
-          </a:p>
-          <a:p>
-            <a:pPr>
-              <a:spcBef>
-                <a:spcPts val="800"/>
-              </a:spcBef>
-              <a:defRPr sz="950" b="1">
-                <a:solidFill>
-                  <a:srgbClr val="0F172A"/>
-                </a:solidFill>
-              </a:defRPr>
-            </a:pPr>
-            <a:r>
-              <a:t>✔ Review II Deliverable Status: </a:t>
-            </a:r>
-            <a:r>
-              <a:rPr b="0">
-                <a:solidFill>
-                  <a:srgbClr val="64748B"/>
-                </a:solidFill>
-              </a:rPr>
-              <a:t>Core signal processing and embedded software architecture fully demonstrated and benchmarked (~20% completion target met).</a:t>
+              </a:defRPr>
+            </a:pPr>
+            <a:r>
+              <a:t>Spectrogram Feature Verification: Notice the prominent energy surge (yellow/orange bands) across 1.5–5 kHz in the right plot, reflecting continuous hydrodynamic turbulence used as the input tensor for our TinyML model.</a:t>
             </a:r>
           </a:p>
         </p:txBody>

--- a/presentation/Review2_Presentation.pptx
+++ b/presentation/Review2_Presentation.pptx
@@ -3314,8 +3314,8 @@
         </p:nvSpPr>
         <p:spPr>
           <a:xfrm>
-            <a:off x="1371600" y="4114800"/>
-            <a:ext cx="9418320" cy="1645920"/>
+            <a:off x="1371600" y="4069080"/>
+            <a:ext cx="9418320" cy="1737360"/>
           </a:xfrm>
           <a:prstGeom prst="rect">
             <a:avLst/>
@@ -3329,14 +3329,14 @@
           <a:lstStyle/>
           <a:p>
             <a:pPr>
-              <a:defRPr sz="1200" b="1">
+              <a:defRPr sz="1150" b="1">
                 <a:solidFill>
                   <a:srgbClr val="0F172A"/>
                 </a:solidFill>
               </a:defRPr>
             </a:pPr>
             <a:r>
-              <a:t>Student Team: B.Tech Computer Science &amp; Engineering</a:t>
+              <a:t>Student Team (SCOPE — School of Computer Science &amp; Engineering):</a:t>
             </a:r>
           </a:p>
           <a:p>
@@ -3344,20 +3344,35 @@
               <a:spcBef>
                 <a:spcPts val="300"/>
               </a:spcBef>
-              <a:defRPr sz="1100">
+              <a:defRPr sz="1100" b="1">
+                <a:solidFill>
+                  <a:srgbClr val="2563EB"/>
+                </a:solidFill>
+              </a:defRPr>
+            </a:pPr>
+            <a:r>
+              <a:t>• Atharv Deshpande (25BAI1337)   |   • Ojas Sugur (25BAI1222)   |   • Vishwajeet Shelar (25BAI1581)</a:t>
+            </a:r>
+          </a:p>
+          <a:p>
+            <a:pPr>
+              <a:spcBef>
+                <a:spcPts val="200"/>
+              </a:spcBef>
+              <a:defRPr sz="1000">
                 <a:solidFill>
                   <a:srgbClr val="64748B"/>
                 </a:solidFill>
               </a:defRPr>
             </a:pPr>
             <a:r>
-              <a:t>Team Members: Atharv Deshpande &amp; Project Partners | Specialization: AI / Core CSE</a:t>
+              <a:t>Program: B.Tech Computer Science &amp; Engineering (Specialization in AI &amp; ML)</a:t>
             </a:r>
           </a:p>
           <a:p>
             <a:pPr>
               <a:spcBef>
-                <a:spcPts val="600"/>
+                <a:spcPts val="500"/>
               </a:spcBef>
               <a:defRPr sz="1100" b="1">
                 <a:solidFill>
@@ -3366,7 +3381,7 @@
               </a:defRPr>
             </a:pPr>
             <a:r>
-              <a:t>Project Guide: Assigned Faculty Mentor, Department of Computer Science &amp; Engineering</a:t>
+              <a:t>Project Guide: Prof. Sujithra Kanmani, School of Computer Science &amp; Engineering (SCOPE)</a:t>
             </a:r>
           </a:p>
         </p:txBody>

--- a/presentation/Review2_Presentation.pptx
+++ b/presentation/Review2_Presentation.pptx
@@ -4376,8 +4376,8 @@
         </p:nvSpPr>
         <p:spPr>
           <a:xfrm>
-            <a:off x="731520" y="1463040"/>
-            <a:ext cx="3429000" cy="4754880"/>
+            <a:off x="731520" y="1371600"/>
+            <a:ext cx="3429000" cy="4114800"/>
           </a:xfrm>
           <a:prstGeom prst="roundRect">
             <a:avLst/>
@@ -4421,8 +4421,8 @@
         </p:nvSpPr>
         <p:spPr>
           <a:xfrm>
-            <a:off x="960120" y="1691640"/>
-            <a:ext cx="2971800" cy="4297680"/>
+            <a:off x="914400" y="1508760"/>
+            <a:ext cx="3063240" cy="3840480"/>
           </a:xfrm>
           <a:prstGeom prst="rect">
             <a:avLst/>
@@ -4436,29 +4436,29 @@
           <a:lstStyle/>
           <a:p>
             <a:pPr>
-              <a:defRPr sz="1300" b="1">
+              <a:defRPr sz="1200" b="1">
                 <a:solidFill>
                   <a:srgbClr val="0F172A"/>
                 </a:solidFill>
               </a:defRPr>
             </a:pPr>
             <a:r>
-              <a:t>The Global &amp; Municipal Challenge</a:t>
+              <a:t>The Global Problem (World Bank)</a:t>
             </a:r>
           </a:p>
           <a:p>
             <a:pPr>
               <a:spcBef>
-                <a:spcPts val="800"/>
+                <a:spcPts val="600"/>
               </a:spcBef>
-              <a:defRPr sz="1000" b="1">
+              <a:defRPr sz="950" b="1">
                 <a:solidFill>
                   <a:srgbClr val="0F172A"/>
                 </a:solidFill>
               </a:defRPr>
             </a:pPr>
             <a:r>
-              <a:t>• 30% – 50% Water Loss: </a:t>
+              <a:t>• 32 Billion m³/yr Physical Loss: </a:t>
             </a:r>
             <a:r>
               <a:rPr b="0">
@@ -4466,22 +4466,22 @@
                   <a:srgbClr val="64748B"/>
                 </a:solidFill>
               </a:rPr>
-              <a:t>Municipal distribution systems lose massive fluid volumes to Non-Revenue Water (NRW) before reaching consumers.</a:t>
+              <a:t>Over 32 billion cubic meters of treated water leak annually from distribution networks worldwide (Kingdom et al., World Bank).</a:t>
             </a:r>
           </a:p>
           <a:p>
             <a:pPr>
               <a:spcBef>
-                <a:spcPts val="800"/>
+                <a:spcPts val="600"/>
               </a:spcBef>
-              <a:defRPr sz="1000" b="1">
+              <a:defRPr sz="950" b="1">
                 <a:solidFill>
                   <a:srgbClr val="0F172A"/>
                 </a:solidFill>
               </a:defRPr>
             </a:pPr>
             <a:r>
-              <a:t>• Invisible Micro-Cracks: </a:t>
+              <a:t>• $14 Billion Annual Cost: </a:t>
             </a:r>
             <a:r>
               <a:rPr b="0">
@@ -4489,15 +4489,15 @@
                   <a:srgbClr val="64748B"/>
                 </a:solidFill>
               </a:rPr>
-              <a:t>Pressurized pipeline leaks start as sub-millimeter fissures that remain structurally undetected for months.</a:t>
+              <a:t>Unmetered leaks cost water utilities worldwide &gt;$14B/year in energy, treatment chemicals, and revenue drain.</a:t>
             </a:r>
           </a:p>
           <a:p>
             <a:pPr>
               <a:spcBef>
-                <a:spcPts val="800"/>
+                <a:spcPts val="600"/>
               </a:spcBef>
-              <a:defRPr sz="1000" b="1">
+              <a:defRPr sz="950" b="1">
                 <a:solidFill>
                   <a:srgbClr val="0F172A"/>
                 </a:solidFill>
@@ -4512,7 +4512,7 @@
                   <a:srgbClr val="64748B"/>
                 </a:solidFill>
               </a:rPr>
-              <a:t>Unchecked micro-leaks cause soil erosion, catastrophic road cave-ins, and severe building foundation damage.</a:t>
+              <a:t>Pressurized fissures erode soil sub-bases, leading to ground subsidence, sinkholes, and structural foundation collapse.</a:t>
             </a:r>
           </a:p>
         </p:txBody>
@@ -4525,8 +4525,8 @@
         </p:nvSpPr>
         <p:spPr>
           <a:xfrm>
-            <a:off x="4343400" y="1463040"/>
-            <a:ext cx="3429000" cy="4754880"/>
+            <a:off x="4343400" y="1371600"/>
+            <a:ext cx="3429000" cy="4114800"/>
           </a:xfrm>
           <a:prstGeom prst="roundRect">
             <a:avLst/>
@@ -4570,8 +4570,8 @@
         </p:nvSpPr>
         <p:spPr>
           <a:xfrm>
-            <a:off x="4572000" y="1691640"/>
-            <a:ext cx="2971800" cy="4297680"/>
+            <a:off x="4526280" y="1508760"/>
+            <a:ext cx="3063240" cy="3840480"/>
           </a:xfrm>
           <a:prstGeom prst="rect">
             <a:avLst/>
@@ -4585,29 +4585,29 @@
           <a:lstStyle/>
           <a:p>
             <a:pPr>
-              <a:defRPr sz="1300" b="1">
+              <a:defRPr sz="1200" b="1">
                 <a:solidFill>
                   <a:srgbClr val="0F172A"/>
                 </a:solidFill>
               </a:defRPr>
             </a:pPr>
             <a:r>
-              <a:t>Failure of Conventional Approaches</a:t>
+              <a:t>Urban India Crisis (NITI Aayog)</a:t>
             </a:r>
           </a:p>
           <a:p>
             <a:pPr>
               <a:spcBef>
-                <a:spcPts val="800"/>
+                <a:spcPts val="600"/>
               </a:spcBef>
-              <a:defRPr sz="1000" b="1">
+              <a:defRPr sz="950" b="1">
                 <a:solidFill>
                   <a:srgbClr val="0F172A"/>
                 </a:solidFill>
               </a:defRPr>
             </a:pPr>
             <a:r>
-              <a:t>• Manual Acoustic Patrols: </a:t>
+              <a:t>• ~40% Urban Distribution Loss: </a:t>
             </a:r>
             <a:r>
               <a:rPr b="0">
@@ -4615,22 +4615,22 @@
                   <a:srgbClr val="64748B"/>
                 </a:solidFill>
               </a:rPr>
-              <a:t>Technicians use acoustic listening rods periodically; inspection is labor-intensive, human-dependent, and non-continuous.</a:t>
+              <a:t>NITI Aayog Composite Water Management Index (CWMI) reports that ~40% of piped urban water in India is lost due to leakages.</a:t>
             </a:r>
           </a:p>
           <a:p>
             <a:pPr>
               <a:spcBef>
-                <a:spcPts val="800"/>
+                <a:spcPts val="600"/>
               </a:spcBef>
-              <a:defRPr sz="1000" b="1">
+              <a:defRPr sz="950" b="1">
                 <a:solidFill>
                   <a:srgbClr val="0F172A"/>
                 </a:solidFill>
               </a:defRPr>
             </a:pPr>
             <a:r>
-              <a:t>• Cloud-IoT Bandwidth Congestion: </a:t>
+              <a:t>• Intermittent Supply Vulnerability: </a:t>
             </a:r>
             <a:r>
               <a:rPr b="0">
@@ -4638,22 +4638,22 @@
                   <a:srgbClr val="64748B"/>
                 </a:solidFill>
               </a:rPr>
-              <a:t>Streaming raw audio/vibration to cloud platforms consumes ~1.2 GB/day per node, incurring high data costs.</a:t>
+              <a:t>Sub-millimeter micro-cracks allow contaminated groundwater suction during non-pressurized supply cycles.</a:t>
             </a:r>
           </a:p>
           <a:p>
             <a:pPr>
               <a:spcBef>
-                <a:spcPts val="800"/>
+                <a:spcPts val="600"/>
               </a:spcBef>
-              <a:defRPr sz="1000" b="1">
+              <a:defRPr sz="950" b="1">
                 <a:solidFill>
                   <a:srgbClr val="0F172A"/>
                 </a:solidFill>
               </a:defRPr>
             </a:pPr>
             <a:r>
-              <a:t>• Zero Autonomous Shutoff: </a:t>
+              <a:t>• Ineffective Manual Patrols: </a:t>
             </a:r>
             <a:r>
               <a:rPr b="0">
@@ -4661,7 +4661,7 @@
                   <a:srgbClr val="64748B"/>
                 </a:solidFill>
               </a:rPr>
-              <a:t>Existing loggers only record data; they cannot physically isolate the leak during network outages.</a:t>
+              <a:t>Listening sticks are periodic, human-dependent, and fail to provide preventative 24/7 coverage.</a:t>
             </a:r>
           </a:p>
         </p:txBody>
@@ -4674,8 +4674,8 @@
         </p:nvSpPr>
         <p:spPr>
           <a:xfrm>
-            <a:off x="7955280" y="1463040"/>
-            <a:ext cx="3429000" cy="4754880"/>
+            <a:off x="7955280" y="1371600"/>
+            <a:ext cx="3429000" cy="4114800"/>
           </a:xfrm>
           <a:prstGeom prst="roundRect">
             <a:avLst/>
@@ -4719,8 +4719,8 @@
         </p:nvSpPr>
         <p:spPr>
           <a:xfrm>
-            <a:off x="8183880" y="1691640"/>
-            <a:ext cx="2971800" cy="4297680"/>
+            <a:off x="8138160" y="1508760"/>
+            <a:ext cx="3063240" cy="3840480"/>
           </a:xfrm>
           <a:prstGeom prst="rect">
             <a:avLst/>
@@ -4734,21 +4734,155 @@
           <a:lstStyle/>
           <a:p>
             <a:pPr>
-              <a:defRPr sz="1300" b="1">
+              <a:defRPr sz="1200" b="1">
                 <a:solidFill>
                   <a:srgbClr val="2563EB"/>
                 </a:solidFill>
               </a:defRPr>
             </a:pPr>
             <a:r>
-              <a:t>The Edge AI (TinyML) Breakthrough</a:t>
+              <a:t>The Edge AI (TinyML) Solution</a:t>
             </a:r>
           </a:p>
           <a:p>
             <a:pPr>
               <a:spcBef>
-                <a:spcPts val="800"/>
+                <a:spcPts val="600"/>
               </a:spcBef>
+              <a:defRPr sz="950" b="1">
+                <a:solidFill>
+                  <a:srgbClr val="0F172A"/>
+                </a:solidFill>
+              </a:defRPr>
+            </a:pPr>
+            <a:r>
+              <a:t>• In-Situ Processing: </a:t>
+            </a:r>
+            <a:r>
+              <a:rPr b="0">
+                <a:solidFill>
+                  <a:srgbClr val="64748B"/>
+                </a:solidFill>
+              </a:rPr>
+              <a:t>Shifting intelligence onto sub-watt dual-core ESP32 microcontrollers eliminates streaming 1.2 GB/day raw audio to the cloud.</a:t>
+            </a:r>
+          </a:p>
+          <a:p>
+            <a:pPr>
+              <a:spcBef>
+                <a:spcPts val="600"/>
+              </a:spcBef>
+              <a:defRPr sz="950" b="1">
+                <a:solidFill>
+                  <a:srgbClr val="0F172A"/>
+                </a:solidFill>
+              </a:defRPr>
+            </a:pPr>
+            <a:r>
+              <a:t>• Sub-200ms Decision Latency: </a:t>
+            </a:r>
+            <a:r>
+              <a:rPr b="0">
+                <a:solidFill>
+                  <a:srgbClr val="64748B"/>
+                </a:solidFill>
+              </a:rPr>
+              <a:t>Local 8-bit quantized CNN classifies micro-leak acoustic turbulence within milliseconds.</a:t>
+            </a:r>
+          </a:p>
+          <a:p>
+            <a:pPr>
+              <a:spcBef>
+                <a:spcPts val="600"/>
+              </a:spcBef>
+              <a:defRPr sz="950" b="1">
+                <a:solidFill>
+                  <a:srgbClr val="0F172A"/>
+                </a:solidFill>
+              </a:defRPr>
+            </a:pPr>
+            <a:r>
+              <a:t>• Offline Fail-Safe Actuation: </a:t>
+            </a:r>
+            <a:r>
+              <a:rPr b="0">
+                <a:solidFill>
+                  <a:srgbClr val="64748B"/>
+                </a:solidFill>
+              </a:rPr>
+              <a:t>Direct GPIO-triggered solenoid shutoff valve isolates faults even during total Wi-Fi/cellular network outages.</a:t>
+            </a:r>
+          </a:p>
+        </p:txBody>
+      </p:sp>
+      <p:sp>
+        <p:nvSpPr>
+          <p:cNvPr id="10" name="Rounded Rectangle 9"/>
+          <p:cNvSpPr/>
+          <p:nvPr/>
+        </p:nvSpPr>
+        <p:spPr>
+          <a:xfrm>
+            <a:off x="731520" y="5623560"/>
+            <a:ext cx="10698480" cy="822960"/>
+          </a:xfrm>
+          <a:prstGeom prst="roundRect">
+            <a:avLst/>
+          </a:prstGeom>
+          <a:solidFill>
+            <a:srgbClr val="F1F5F9"/>
+          </a:solidFill>
+          <a:ln>
+            <a:solidFill>
+              <a:srgbClr val="E2E8F0"/>
+            </a:solidFill>
+          </a:ln>
+        </p:spPr>
+        <p:style>
+          <a:lnRef idx="1">
+            <a:schemeClr val="accent1"/>
+          </a:lnRef>
+          <a:fillRef idx="3">
+            <a:schemeClr val="accent1"/>
+          </a:fillRef>
+          <a:effectRef idx="2">
+            <a:schemeClr val="accent1"/>
+          </a:effectRef>
+          <a:fontRef idx="minor">
+            <a:schemeClr val="lt1"/>
+          </a:fontRef>
+        </p:style>
+        <p:txBody>
+          <a:bodyPr rtlCol="0" anchor="ctr"/>
+          <a:lstStyle/>
+          <a:p>
+            <a:pPr algn="ctr"/>
+          </a:p>
+        </p:txBody>
+      </p:sp>
+      <p:sp>
+        <p:nvSpPr>
+          <p:cNvPr id="11" name="TextBox 10"/>
+          <p:cNvSpPr txBox="1"/>
+          <p:nvPr/>
+        </p:nvSpPr>
+        <p:spPr>
+          <a:xfrm>
+            <a:off x="914400" y="5687568"/>
+            <a:ext cx="10332720" cy="685800"/>
+          </a:xfrm>
+          <a:prstGeom prst="rect">
+            <a:avLst/>
+          </a:prstGeom>
+          <a:noFill/>
+        </p:spPr>
+        <p:txBody>
+          <a:bodyPr wrap="square" tIns="0" lIns="0" rIns="0" bIns="0">
+            <a:spAutoFit/>
+          </a:bodyPr>
+          <a:lstStyle/>
+          <a:p>
+            <a:pPr>
               <a:defRPr sz="1000" b="1">
                 <a:solidFill>
                   <a:srgbClr val="0F172A"/>
@@ -4756,61 +4890,55 @@
               </a:defRPr>
             </a:pPr>
             <a:r>
-              <a:t>• In-Situ Processing: </a:t>
-            </a:r>
-            <a:r>
-              <a:rPr b="0">
+              <a:t>Authoritative Data Sources &amp; Reference Links:</a:t>
+            </a:r>
+          </a:p>
+          <a:p>
+            <a:pPr>
+              <a:spcBef>
+                <a:spcPts val="200"/>
+              </a:spcBef>
+            </a:pPr>
+            <a:r>
+              <a:rPr sz="850">
                 <a:solidFill>
                   <a:srgbClr val="64748B"/>
                 </a:solidFill>
               </a:rPr>
-              <a:t>Shifting intelligence directly onto sub-watt dual-core microcontrollers eliminates raw audio streaming completely.</a:t>
+              <a:t>1. World Bank Water Sector Report No. 8 (Kingdom et al.): </a:t>
+            </a:r>
+            <a:r>
+              <a:rPr sz="850" u="sng">
+                <a:solidFill>
+                  <a:srgbClr val="2563EB"/>
+                </a:solidFill>
+                <a:hlinkClick r:id="rId2"/>
+              </a:rPr>
+              <a:t>documents.worldbank.org/en/publication/documents-reports/documentdetail/659421468162125557</a:t>
             </a:r>
           </a:p>
           <a:p>
             <a:pPr>
               <a:spcBef>
-                <a:spcPts val="800"/>
+                <a:spcPts val="100"/>
               </a:spcBef>
-              <a:defRPr sz="1000" b="1">
-                <a:solidFill>
-                  <a:srgbClr val="0F172A"/>
-                </a:solidFill>
-              </a:defRPr>
-            </a:pPr>
-            <a:r>
-              <a:t>• Sub-200ms Latency: </a:t>
-            </a:r>
-            <a:r>
-              <a:rPr b="0">
+            </a:pPr>
+            <a:r>
+              <a:rPr sz="850">
                 <a:solidFill>
                   <a:srgbClr val="64748B"/>
                 </a:solidFill>
               </a:rPr>
-              <a:t>On-device quantized neural inference detects leak acoustic signatures in milliseconds.</a:t>
-            </a:r>
-          </a:p>
-          <a:p>
-            <a:pPr>
-              <a:spcBef>
-                <a:spcPts val="800"/>
-              </a:spcBef>
-              <a:defRPr sz="1000" b="1">
-                <a:solidFill>
-                  <a:srgbClr val="0F172A"/>
-                </a:solidFill>
-              </a:defRPr>
-            </a:pPr>
-            <a:r>
-              <a:t>• Autonomous Isolation: </a:t>
-            </a:r>
-            <a:r>
-              <a:rPr b="0">
-                <a:solidFill>
-                  <a:srgbClr val="64748B"/>
-                </a:solidFill>
+              <a:t>2. NITI Aayog Composite Water Management Index (CWMI): </a:t>
+            </a:r>
+            <a:r>
+              <a:rPr sz="850" u="sng">
+                <a:solidFill>
+                  <a:srgbClr val="2563EB"/>
+                </a:solidFill>
+                <a:hlinkClick r:id="rId3"/>
               </a:rPr>
-              <a:t>Direct GPIO-triggered solenoid shutoff valve prevents catastrophic flooding even if Wi-Fi fails entirely.</a:t>
+              <a:t>niti.gov.in/report-and-publication</a:t>
             </a:r>
           </a:p>
         </p:txBody>
@@ -4921,7 +5049,7 @@
               </a:defRPr>
             </a:pPr>
             <a:r>
-              <a:t>Literature Survey: Comparative Analysis of Existing Baselines</a:t>
+              <a:t>Literature Survey: Comparative Analysis of Baseline Research</a:t>
             </a:r>
           </a:p>
         </p:txBody>
@@ -4934,8 +5062,8 @@
         </p:nvSpPr>
         <p:spPr>
           <a:xfrm>
-            <a:off x="731520" y="1463040"/>
-            <a:ext cx="10698480" cy="1463040"/>
+            <a:off x="731520" y="1371600"/>
+            <a:ext cx="10698480" cy="1572768"/>
           </a:xfrm>
           <a:prstGeom prst="roundRect">
             <a:avLst/>
@@ -4979,8 +5107,8 @@
         </p:nvSpPr>
         <p:spPr>
           <a:xfrm>
-            <a:off x="914400" y="1572768"/>
-            <a:ext cx="10332720" cy="1234440"/>
+            <a:off x="914400" y="1463040"/>
+            <a:ext cx="10332720" cy="1371600"/>
           </a:xfrm>
           <a:prstGeom prst="rect">
             <a:avLst/>
@@ -4994,22 +5122,32 @@
           <a:lstStyle/>
           <a:p>
             <a:pPr>
-              <a:defRPr sz="1200" b="1">
+              <a:defRPr sz="1100" b="1">
                 <a:solidFill>
                   <a:srgbClr val="0F172A"/>
                 </a:solidFill>
               </a:defRPr>
             </a:pPr>
             <a:r>
-              <a:t>Acoustic Wave Propagation in Plastic Pipes  |  </a:t>
-            </a:r>
-            <a:r>
-              <a:rPr sz="1100" b="0">
+              <a:t>Acoustical Characteristics of Leak Signals in Plastic Water Pipes</a:t>
+            </a:r>
+            <a:br/>
+            <a:r>
+              <a:rPr sz="950" b="0">
+                <a:solidFill>
+                  <a:srgbClr val="64748B"/>
+                </a:solidFill>
+              </a:rPr>
+              <a:t>Source: O. Hunaidi &amp; W. T. Chu (National Research Council Canada), Applied Acoustics, 58(3), 235-254  |  </a:t>
+            </a:r>
+            <a:r>
+              <a:rPr sz="950" b="1" u="sng">
                 <a:solidFill>
                   <a:srgbClr val="2563EB"/>
                 </a:solidFill>
+                <a:hlinkClick r:id="rId2"/>
               </a:rPr>
-              <a:t>Hunaidi et al. (National Research Council Canada)</a:t>
+              <a:t>DOI: https://doi.org/10.1016/S0003-682X(99)00013-4</a:t>
             </a:r>
           </a:p>
           <a:p>
@@ -5017,29 +5155,29 @@
               <a:spcBef>
                 <a:spcPts val="300"/>
               </a:spcBef>
-              <a:defRPr sz="950">
-                <a:solidFill>
-                  <a:srgbClr val="64748B"/>
-                </a:solidFill>
-              </a:defRPr>
-            </a:pPr>
-            <a:r>
-              <a:t>• Approach: Analyzed acoustic vibration attenuation in PVC and MDPE water distribution pipes. Key Finding: Demonstrated that high frequencies (&gt;2 kHz) attenuate rapidly in plastic. Highlighted that leak energy concentrates in 1–5 kHz bands.</a:t>
+              <a:defRPr sz="900">
+                <a:solidFill>
+                  <a:srgbClr val="334155"/>
+                </a:solidFill>
+              </a:defRPr>
+            </a:pPr>
+            <a:r>
+              <a:t>• Approach &amp; Finding: Acoustic frequency propagation and attenuation analysis in PVC and MDPE distribution pipes. Demonstrated that higher frequencies (&gt;2 kHz) attenuate rapidly in plastic pipes; proven that leak turbulence energy concentrates in 1–5 kHz band.</a:t>
             </a:r>
           </a:p>
           <a:p>
             <a:pPr>
               <a:spcBef>
-                <a:spcPts val="300"/>
+                <a:spcPts val="200"/>
               </a:spcBef>
-              <a:defRPr sz="950" b="1">
+              <a:defRPr sz="900" b="1">
                 <a:solidFill>
                   <a:srgbClr val="B91C1C"/>
                 </a:solidFill>
               </a:defRPr>
             </a:pPr>
             <a:r>
-              <a:t>• Research Limitation: Focused on offline acoustic correlation with bulky lab equipment; no real-time embedded edge classification.</a:t>
+              <a:t>• Research Limitation: Focused on offline cross-correlation using bulky laboratory hydrophones and PC DAQ; no real-time embedded edge classifier or automated actuation.</a:t>
             </a:r>
           </a:p>
         </p:txBody>
@@ -5053,7 +5191,7 @@
         <p:spPr>
           <a:xfrm>
             <a:off x="731520" y="3063240"/>
-            <a:ext cx="10698480" cy="1463040"/>
+            <a:ext cx="10698480" cy="1572768"/>
           </a:xfrm>
           <a:prstGeom prst="roundRect">
             <a:avLst/>
@@ -5097,8 +5235,8 @@
         </p:nvSpPr>
         <p:spPr>
           <a:xfrm>
-            <a:off x="914400" y="3172968"/>
-            <a:ext cx="10332720" cy="1234440"/>
+            <a:off x="914400" y="3154680"/>
+            <a:ext cx="10332720" cy="1371600"/>
           </a:xfrm>
           <a:prstGeom prst="rect">
             <a:avLst/>
@@ -5112,22 +5250,32 @@
           <a:lstStyle/>
           <a:p>
             <a:pPr>
-              <a:defRPr sz="1200" b="1">
+              <a:defRPr sz="1100" b="1">
                 <a:solidFill>
                   <a:srgbClr val="0F172A"/>
                 </a:solidFill>
               </a:defRPr>
             </a:pPr>
             <a:r>
-              <a:t>District Metering Area (DMA) Mass-Balance  |  </a:t>
-            </a:r>
-            <a:r>
-              <a:rPr sz="1100" b="0">
+              <a:t>Leakage Fault Detection in a District Metered Area (DMA)</a:t>
+            </a:r>
+            <a:br/>
+            <a:r>
+              <a:rPr sz="950" b="0">
+                <a:solidFill>
+                  <a:srgbClr val="64748B"/>
+                </a:solidFill>
+              </a:rPr>
+              <a:t>Source: D. G. Eliades &amp; M. M. Polycarpou, Water Resources Management / IEEE, 29(10), 3843-3860  |  </a:t>
+            </a:r>
+            <a:r>
+              <a:rPr sz="950" b="1" u="sng">
                 <a:solidFill>
                   <a:srgbClr val="2563EB"/>
                 </a:solidFill>
+                <a:hlinkClick r:id="rId3"/>
               </a:rPr>
-              <a:t>SCADA Hydraulic Flow-Balance Systems</a:t>
+              <a:t>DOI: https://doi.org/10.1007/s11269-015-1066-z</a:t>
             </a:r>
           </a:p>
           <a:p>
@@ -5135,29 +5283,29 @@
               <a:spcBef>
                 <a:spcPts val="300"/>
               </a:spcBef>
-              <a:defRPr sz="950">
-                <a:solidFill>
-                  <a:srgbClr val="64748B"/>
-                </a:solidFill>
-              </a:defRPr>
-            </a:pPr>
-            <a:r>
-              <a:t>• Approach: Utilizes electromagnetic flow meters at district inlet/outlet boundaries to monitor net water volume discrepancies. Key Finding: Reliable for macro-ruptures and municipal-level volumetric accounting.</a:t>
+              <a:defRPr sz="900">
+                <a:solidFill>
+                  <a:srgbClr val="334155"/>
+                </a:solidFill>
+              </a:defRPr>
+            </a:pPr>
+            <a:r>
+              <a:t>• Approach &amp; Finding: SCADA boundary flow balancing and cumulative sum (CUSUM) statistical inflow anomaly detection. Effective for macro-level volumetric monitoring and catastrophic municipal trunk-line bursts.</a:t>
             </a:r>
           </a:p>
           <a:p>
             <a:pPr>
               <a:spcBef>
-                <a:spcPts val="300"/>
+                <a:spcPts val="200"/>
               </a:spcBef>
-              <a:defRPr sz="950" b="1">
+              <a:defRPr sz="900" b="1">
                 <a:solidFill>
                   <a:srgbClr val="B91C1C"/>
                 </a:solidFill>
               </a:defRPr>
             </a:pPr>
             <a:r>
-              <a:t>• Research Limitation: Completely blind to micro-cracks (&lt;10% volume loss); cannot localize faults or provide fast mechanical shutoff.</a:t>
+              <a:t>• Research Limitation: Macroscopic approach: completely blind to localized weeping micro-cracks (&lt;10% flow drop); incapable of pinpointing leak distance or local valve control.</a:t>
             </a:r>
           </a:p>
         </p:txBody>
@@ -5170,8 +5318,8 @@
         </p:nvSpPr>
         <p:spPr>
           <a:xfrm>
-            <a:off x="731520" y="4663440"/>
-            <a:ext cx="10698480" cy="1463040"/>
+            <a:off x="731520" y="4754880"/>
+            <a:ext cx="10698480" cy="1572768"/>
           </a:xfrm>
           <a:prstGeom prst="roundRect">
             <a:avLst/>
@@ -5215,8 +5363,8 @@
         </p:nvSpPr>
         <p:spPr>
           <a:xfrm>
-            <a:off x="914400" y="4773168"/>
-            <a:ext cx="10332720" cy="1234440"/>
+            <a:off x="914400" y="4846320"/>
+            <a:ext cx="10332720" cy="1371600"/>
           </a:xfrm>
           <a:prstGeom prst="rect">
             <a:avLst/>
@@ -5230,22 +5378,32 @@
           <a:lstStyle/>
           <a:p>
             <a:pPr>
-              <a:defRPr sz="1200" b="1">
+              <a:defRPr sz="1100" b="1">
                 <a:solidFill>
                   <a:srgbClr val="0F172A"/>
                 </a:solidFill>
               </a:defRPr>
             </a:pPr>
             <a:r>
-              <a:t>Cloud-Connected Acoustic IoT Streamers  |  </a:t>
-            </a:r>
-            <a:r>
-              <a:rPr sz="1100" b="0">
+              <a:t>Time–Frequency CNNs for Pipeline Acoustic Leak Detection</a:t>
+            </a:r>
+            <a:br/>
+            <a:r>
+              <a:rPr sz="950" b="0">
+                <a:solidFill>
+                  <a:srgbClr val="64748B"/>
+                </a:solidFill>
+              </a:rPr>
+              <a:t>Source: J. Kang et al. (Measurement, 186, 110094) &amp; IEEE Sensors Journal (10.1109/JSEN.2026.3609802)  |  </a:t>
+            </a:r>
+            <a:r>
+              <a:rPr sz="950" b="1" u="sng">
                 <a:solidFill>
                   <a:srgbClr val="2563EB"/>
                 </a:solidFill>
+                <a:hlinkClick r:id="rId4"/>
               </a:rPr>
-              <a:t>Commercial Acoustic Loggers (Gutermann, Sewerin)</a:t>
+              <a:t>DOI: https://doi.org/10.1016/j.measurement.2021.110094</a:t>
             </a:r>
           </a:p>
           <a:p>
@@ -5253,29 +5411,29 @@
               <a:spcBef>
                 <a:spcPts val="300"/>
               </a:spcBef>
-              <a:defRPr sz="950">
-                <a:solidFill>
-                  <a:srgbClr val="64748B"/>
-                </a:solidFill>
-              </a:defRPr>
-            </a:pPr>
-            <a:r>
-              <a:t>• Approach: Deployed vibration sensors that upload recorded audio clips or telemetry via GSM/LoRaWAN to cloud servers. Key Finding: Enables map-based leak dashboards across city zones.</a:t>
+              <a:defRPr sz="900">
+                <a:solidFill>
+                  <a:srgbClr val="334155"/>
+                </a:solidFill>
+              </a:defRPr>
+            </a:pPr>
+            <a:r>
+              <a:t>• Approach &amp; Finding: Converts vibration waveforms into 2D time-frequency spectrograms and trains CNN classifiers. Achieves &gt;92% classification accuracy by extracting 2D harmonic and broadband turbulence features.</a:t>
             </a:r>
           </a:p>
           <a:p>
             <a:pPr>
               <a:spcBef>
-                <a:spcPts val="300"/>
+                <a:spcPts val="200"/>
               </a:spcBef>
-              <a:defRPr sz="950" b="1">
+              <a:defRPr sz="900" b="1">
                 <a:solidFill>
                   <a:srgbClr val="B91C1C"/>
                 </a:solidFill>
               </a:defRPr>
             </a:pPr>
             <a:r>
-              <a:t>• Research Limitation: Excessive unit cost (₹1,00,000+); high SIM/cellular bandwidth overhead; high latency (hours); no automated emergency actuation.</a:t>
+              <a:t>• Research Limitation: Tested on high-power GPU workstations with cloud streaming; no sub-watt TinyML microcontroller deployment, int8 quantization, or edge shutoff integration.</a:t>
             </a:r>
           </a:p>
         </p:txBody>

--- a/presentation/Review2_Presentation.pptx
+++ b/presentation/Review2_Presentation.pptx
@@ -6606,186 +6606,14 @@
         </p:blipFill>
         <p:spPr>
           <a:xfrm>
-            <a:off x="731520" y="1371600"/>
-            <a:ext cx="7498079" cy="4261498"/>
+            <a:off x="603504" y="1188720"/>
+            <a:ext cx="10972800" cy="5437414"/>
           </a:xfrm>
           <a:prstGeom prst="rect">
             <a:avLst/>
           </a:prstGeom>
         </p:spPr>
       </p:pic>
-      <p:sp>
-        <p:nvSpPr>
-          <p:cNvPr id="5" name="Rounded Rectangle 4"/>
-          <p:cNvSpPr/>
-          <p:nvPr/>
-        </p:nvSpPr>
-        <p:spPr>
-          <a:xfrm>
-            <a:off x="8412480" y="1371600"/>
-            <a:ext cx="3017520" cy="4846320"/>
-          </a:xfrm>
-          <a:prstGeom prst="roundRect">
-            <a:avLst/>
-          </a:prstGeom>
-          <a:solidFill>
-            <a:srgbClr val="FFFFFF"/>
-          </a:solidFill>
-          <a:ln>
-            <a:solidFill>
-              <a:srgbClr val="E2E8F0"/>
-            </a:solidFill>
-          </a:ln>
-        </p:spPr>
-        <p:style>
-          <a:lnRef idx="1">
-            <a:schemeClr val="accent1"/>
-          </a:lnRef>
-          <a:fillRef idx="3">
-            <a:schemeClr val="accent1"/>
-          </a:fillRef>
-          <a:effectRef idx="2">
-            <a:schemeClr val="accent1"/>
-          </a:effectRef>
-          <a:fontRef idx="minor">
-            <a:schemeClr val="lt1"/>
-          </a:fontRef>
-        </p:style>
-        <p:txBody>
-          <a:bodyPr rtlCol="0" anchor="ctr"/>
-          <a:lstStyle/>
-          <a:p>
-            <a:pPr algn="ctr"/>
-          </a:p>
-        </p:txBody>
-      </p:sp>
-      <p:sp>
-        <p:nvSpPr>
-          <p:cNvPr id="6" name="TextBox 5"/>
-          <p:cNvSpPr txBox="1"/>
-          <p:nvPr/>
-        </p:nvSpPr>
-        <p:spPr>
-          <a:xfrm>
-            <a:off x="8595360" y="1554480"/>
-            <a:ext cx="2651760" cy="4480560"/>
-          </a:xfrm>
-          <a:prstGeom prst="rect">
-            <a:avLst/>
-          </a:prstGeom>
-          <a:noFill/>
-        </p:spPr>
-        <p:txBody>
-          <a:bodyPr wrap="square" tIns="0" lIns="0" rIns="0" bIns="0">
-            <a:spAutoFit/>
-          </a:bodyPr>
-          <a:lstStyle/>
-          <a:p>
-            <a:pPr>
-              <a:defRPr sz="1150" b="1">
-                <a:solidFill>
-                  <a:srgbClr val="0F172A"/>
-                </a:solidFill>
-              </a:defRPr>
-            </a:pPr>
-            <a:r>
-              <a:t>System Architecture Highlights</a:t>
-            </a:r>
-          </a:p>
-          <a:p>
-            <a:pPr>
-              <a:spcBef>
-                <a:spcPts val="600"/>
-              </a:spcBef>
-              <a:defRPr sz="900" b="1">
-                <a:solidFill>
-                  <a:srgbClr val="0D9488"/>
-                </a:solidFill>
-              </a:defRPr>
-            </a:pPr>
-            <a:r>
-              <a:t>• FreeRTOS Dual-Core: </a:t>
-            </a:r>
-            <a:r>
-              <a:rPr b="0">
-                <a:solidFill>
-                  <a:srgbClr val="64748B"/>
-                </a:solidFill>
-              </a:rPr>
-              <a:t>Core 0 handles 16 kHz DMA sampling &amp; DSP FFT; Core 1 handles TFLite Micro inference &amp; MQTT dispatch.</a:t>
-            </a:r>
-          </a:p>
-          <a:p>
-            <a:pPr>
-              <a:spcBef>
-                <a:spcPts val="600"/>
-              </a:spcBef>
-              <a:defRPr sz="900" b="1">
-                <a:solidFill>
-                  <a:srgbClr val="0D9488"/>
-                </a:solidFill>
-              </a:defRPr>
-            </a:pPr>
-            <a:r>
-              <a:t>• Component Trade-Off: </a:t>
-            </a:r>
-            <a:r>
-              <a:rPr b="0">
-                <a:solidFill>
-                  <a:srgbClr val="64748B"/>
-                </a:solidFill>
-              </a:rPr>
-              <a:t>ESP32-S3 chosen over Raspberry Pi (₹650 vs ₹4,500; 500mW vs 5W) and Arduino Uno (has vector instructions &amp; SRAM).</a:t>
-            </a:r>
-          </a:p>
-          <a:p>
-            <a:pPr>
-              <a:spcBef>
-                <a:spcPts val="600"/>
-              </a:spcBef>
-              <a:defRPr sz="900" b="1">
-                <a:solidFill>
-                  <a:srgbClr val="0D9488"/>
-                </a:solidFill>
-              </a:defRPr>
-            </a:pPr>
-            <a:r>
-              <a:t>• Sensor Coupling: </a:t>
-            </a:r>
-            <a:r>
-              <a:rPr b="0">
-                <a:solidFill>
-                  <a:srgbClr val="64748B"/>
-                </a:solidFill>
-              </a:rPr>
-              <a:t>Piezoelectric contact transducer selected over airborne MEMS to eliminate room background chatter.</a:t>
-            </a:r>
-          </a:p>
-          <a:p>
-            <a:pPr>
-              <a:spcBef>
-                <a:spcPts val="600"/>
-              </a:spcBef>
-              <a:defRPr sz="900" b="1">
-                <a:solidFill>
-                  <a:srgbClr val="0D9488"/>
-                </a:solidFill>
-              </a:defRPr>
-            </a:pPr>
-            <a:r>
-              <a:t>• Cost Efficiency: </a:t>
-            </a:r>
-            <a:r>
-              <a:rPr b="0">
-                <a:solidFill>
-                  <a:srgbClr val="64748B"/>
-                </a:solidFill>
-              </a:rPr>
-              <a:t>Complete edge node built under ₹1,800 vs ₹1,00,000+ proprietary commercial loggers.</a:t>
-            </a:r>
-          </a:p>
-        </p:txBody>
-      </p:sp>
     </p:spTree>
   </p:cSld>
   <p:clrMapOvr>

--- a/presentation/Review2_Presentation.pptx
+++ b/presentation/Review2_Presentation.pptx
@@ -6861,7 +6861,7 @@
               </a:defRPr>
             </a:pPr>
             <a:r>
-              <a:t>✔ Empirical Spectral Energy Elevation: </a:t>
+              <a:t>✔ Simulation-Based Spectral Validation: </a:t>
             </a:r>
             <a:r>
               <a:rPr b="0">
@@ -6869,7 +6869,7 @@
                   <a:srgbClr val="64748B"/>
                 </a:solidFill>
               </a:rPr>
-              <a:t>Experimental frequency sweeps confirm &gt;30 dB spectral density surge in 1.5–4.5 kHz band during needle-valve micro-cracks vs. laminar flow.</a:t>
+              <a:t>Synthetic acoustic signal simulations modeled on Hunaidi &amp; Chu (1999) literature confirm &gt;30 dB spectral density surge in 1.5–5.0 kHz turbulence band over laminar flow.</a:t>
             </a:r>
           </a:p>
           <a:p>
@@ -6995,7 +6995,7 @@
               </a:defRPr>
             </a:pPr>
             <a:r>
-              <a:t>Empirical Proof: Laminar Flow vs. Micro-Leak Turbulence</a:t>
+              <a:t>DSP Simulation Validation: Laminar Flow vs. Micro-Leak Turbulence</a:t>
             </a:r>
           </a:p>
         </p:txBody>
@@ -7054,7 +7054,7 @@
               </a:defRPr>
             </a:pPr>
             <a:r>
-              <a:t>Spectrogram Feature Verification: Notice the prominent energy surge (yellow/orange bands) across 1.5–5 kHz in the right plot, reflecting continuous hydrodynamic turbulence used as the input tensor for our TinyML model.</a:t>
+              <a:t>Spectrogram Feature Verification: Synthetic hydrodynamic acoustic signals modeled on published experimental literature (Hunaidi &amp; Chu, 1999) validate that our 16 kHz Log-Mel DSP engine reliably isolates turbulence energy (1.5–5 kHz) prior to physical hardware testbed integration.</a:t>
             </a:r>
           </a:p>
         </p:txBody>
